--- a/docs/materials/welcome/files/osgs26-htc-intro.pptx
+++ b/docs/materials/welcome/files/osgs26-htc-intro.pptx
@@ -219,7 +219,7 @@
           <a:p>
             <a:fld id="{2AEBBA53-B5BE-E248-AF58-61B76F9411E7}" type="datetimeFigureOut">
               <a:rPr lang="en-US" smtClean="0"/>
-              <a:t>7/11/26</a:t>
+              <a:t>7/12/26</a:t>
             </a:fld>
             <a:endParaRPr lang="en-US"/>
           </a:p>
@@ -13359,7 +13359,15 @@
           <a:p>
             <a:r>
               <a:rPr lang="en-US" dirty="0"/>
-              <a:t>LLMs and “AI” agents are powerful tools, well suited to many of the tasks we are doing this week: </a:t>
+              <a:t>LLMs and “AI” agents are </a:t>
+            </a:r>
+            <a:r>
+              <a:rPr lang="en-US" b="1" dirty="0"/>
+              <a:t>powerful tools</a:t>
+            </a:r>
+            <a:r>
+              <a:rPr lang="en-US" dirty="0"/>
+              <a:t>, well suited to many of the tasks we are doing this week: </a:t>
             </a:r>
           </a:p>
           <a:p>
@@ -13386,13 +13394,45 @@
           <a:p>
             <a:r>
               <a:rPr lang="en-US" dirty="0"/>
-              <a:t>AND, they are most effective when their user has the background and context to provide meaningful prompts and interpret the results. </a:t>
-            </a:r>
-          </a:p>
-          <a:p>
+              <a:t>AND, </a:t>
+            </a:r>
+            <a:r>
+              <a:rPr lang="en-US" b="1" dirty="0"/>
+              <a:t>they are most effective</a:t>
+            </a:r>
             <a:r>
               <a:rPr lang="en-US" dirty="0"/>
-              <a:t>AND, we brought you here so you could learn new things! </a:t>
+              <a:t> when their user has the </a:t>
+            </a:r>
+            <a:r>
+              <a:rPr lang="en-US" b="1" dirty="0"/>
+              <a:t>background</a:t>
+            </a:r>
+            <a:r>
+              <a:rPr lang="en-US" dirty="0"/>
+              <a:t> and </a:t>
+            </a:r>
+            <a:r>
+              <a:rPr lang="en-US" b="1" dirty="0"/>
+              <a:t>context</a:t>
+            </a:r>
+            <a:r>
+              <a:rPr lang="en-US" dirty="0"/>
+              <a:t> to provide meaningful prompts and interpret the results. </a:t>
+            </a:r>
+          </a:p>
+          <a:p>
+            <a:r>
+              <a:rPr lang="en-US" dirty="0"/>
+              <a:t>AND, we brought you here so </a:t>
+            </a:r>
+            <a:r>
+              <a:rPr lang="en-US" b="1" dirty="0"/>
+              <a:t>you could learn new things</a:t>
+            </a:r>
+            <a:r>
+              <a:rPr lang="en-US" dirty="0"/>
+              <a:t>! </a:t>
             </a:r>
             <a:r>
               <a:rPr lang="en-US" dirty="0">
@@ -13743,8 +13783,28 @@
           <a:lstStyle/>
           <a:p>
             <a:r>
-              <a:rPr lang="en-US" dirty="0"/>
-              <a:t>Don’t use any LLMs / AI / agents for at least the first 2 days of the School. </a:t>
+              <a:rPr lang="en-US" dirty="0">
+                <a:latin typeface="Helvetica Neue Medium" panose="02000503000000020004" pitchFamily="2" charset="0"/>
+                <a:ea typeface="Helvetica Neue Medium" panose="02000503000000020004" pitchFamily="2" charset="0"/>
+                <a:cs typeface="Helvetica Neue Medium" panose="02000503000000020004" pitchFamily="2" charset="0"/>
+              </a:rPr>
+              <a:t>Don’t use any LLMs / </a:t>
+            </a:r>
+            <a:r>
+              <a:rPr lang="en-US" dirty="0">
+                <a:latin typeface="Helvetica Neue Medium" panose="02000503000000020004" pitchFamily="2" charset="0"/>
+                <a:ea typeface="Helvetica Neue Medium" panose="02000503000000020004" pitchFamily="2" charset="0"/>
+                <a:cs typeface="Helvetica Neue Medium" panose="02000503000000020004" pitchFamily="2" charset="0"/>
+              </a:rPr>
+              <a:t>AI agents </a:t>
+            </a:r>
+            <a:r>
+              <a:rPr lang="en-US" dirty="0">
+                <a:latin typeface="Helvetica Neue Medium" panose="02000503000000020004" pitchFamily="2" charset="0"/>
+                <a:ea typeface="Helvetica Neue Medium" panose="02000503000000020004" pitchFamily="2" charset="0"/>
+                <a:cs typeface="Helvetica Neue Medium" panose="02000503000000020004" pitchFamily="2" charset="0"/>
+              </a:rPr>
+              <a:t>for at least the first 2 days of the School. </a:t>
             </a:r>
           </a:p>
           <a:p>
@@ -13763,7 +13823,11 @@
           </a:p>
           <a:p>
             <a:r>
-              <a:rPr lang="en-US" dirty="0"/>
+              <a:rPr lang="en-US" dirty="0">
+                <a:latin typeface="Helvetica Neue Medium" panose="02000503000000020004" pitchFamily="2" charset="0"/>
+                <a:ea typeface="Helvetica Neue Medium" panose="02000503000000020004" pitchFamily="2" charset="0"/>
+                <a:cs typeface="Helvetica Neue Medium" panose="02000503000000020004" pitchFamily="2" charset="0"/>
+              </a:rPr>
               <a:t>By day 4, use LLMs judiciously for tasks that you could probably do yourself or easily look up. </a:t>
             </a:r>
           </a:p>

--- a/docs/materials/welcome/files/osgs26-htc-intro.pptx
+++ b/docs/materials/welcome/files/osgs26-htc-intro.pptx
@@ -11972,12 +11972,20 @@
               </a:spcAft>
             </a:pPr>
             <a:r>
-              <a:rPr lang="en-US" dirty="0" err="1"/>
+              <a:rPr lang="en-US" dirty="0" err="1">
+                <a:hlinkClick r:id="rId3"/>
+              </a:rPr>
               <a:t>OSPool</a:t>
             </a:r>
             <a:r>
+              <a:rPr lang="en-US" dirty="0">
+                <a:hlinkClick r:id="rId3"/>
+              </a:rPr>
+              <a:t> Introduction </a:t>
+            </a:r>
+            <a:r>
               <a:rPr lang="en-US" dirty="0"/>
-              <a:t> Introduction (Tuesday)</a:t>
+              <a:t>(Tuesday)</a:t>
             </a:r>
           </a:p>
           <a:p>
@@ -11998,7 +12006,7 @@
             <a:pPr lvl="1"/>
             <a:r>
               <a:rPr lang="en-US" dirty="0">
-                <a:hlinkClick r:id="rId3"/>
+                <a:hlinkClick r:id="rId4"/>
               </a:rPr>
               <a:t>Main Page</a:t>
             </a:r>
@@ -12008,13 +12016,13 @@
             </a:r>
             <a:r>
               <a:rPr lang="en-US" dirty="0">
-                <a:hlinkClick r:id="rId4"/>
+                <a:hlinkClick r:id="rId5"/>
               </a:rPr>
               <a:t>Get Started on the </a:t>
             </a:r>
             <a:r>
               <a:rPr lang="en-US" dirty="0" err="1">
-                <a:hlinkClick r:id="rId4"/>
+                <a:hlinkClick r:id="rId5"/>
               </a:rPr>
               <a:t>OSPool</a:t>
             </a:r>
@@ -12031,7 +12039,7 @@
             </a:r>
             <a:r>
               <a:rPr lang="en-US" dirty="0">
-                <a:hlinkClick r:id="rId5"/>
+                <a:hlinkClick r:id="rId6"/>
               </a:rPr>
               <a:t>https://portal.osg-htc.org/</a:t>
             </a:r>
@@ -12272,12 +12280,20 @@
               </a:spcAft>
             </a:pPr>
             <a:r>
-              <a:rPr lang="en-US" dirty="0" err="1"/>
+              <a:rPr lang="en-US" dirty="0" err="1">
+                <a:hlinkClick r:id="rId3"/>
+              </a:rPr>
               <a:t>HTCondor</a:t>
             </a:r>
             <a:r>
+              <a:rPr lang="en-US" dirty="0">
+                <a:hlinkClick r:id="rId3"/>
+              </a:rPr>
+              <a:t> Introduction</a:t>
+            </a:r>
+            <a:r>
               <a:rPr lang="en-US" dirty="0"/>
-              <a:t> Introduction (Mon)</a:t>
+              <a:t> (Mon)</a:t>
             </a:r>
           </a:p>
           <a:p>
@@ -12290,8 +12306,14 @@
               </a:spcAft>
             </a:pPr>
             <a:r>
+              <a:rPr lang="en-US" dirty="0">
+                <a:hlinkClick r:id="rId4"/>
+              </a:rPr>
+              <a:t>Troubleshooting</a:t>
+            </a:r>
+            <a:r>
               <a:rPr lang="en-US" dirty="0"/>
-              <a:t>Troubleshooting (Thurs)</a:t>
+              <a:t> (Thurs)</a:t>
             </a:r>
           </a:p>
           <a:p>
@@ -12304,16 +12326,26 @@
               </a:spcAft>
             </a:pPr>
             <a:r>
+              <a:rPr lang="en-US" dirty="0">
+                <a:hlinkClick r:id="rId5"/>
+              </a:rPr>
+              <a:t>Workflows with </a:t>
+            </a:r>
+            <a:r>
+              <a:rPr lang="en-US" dirty="0" err="1">
+                <a:hlinkClick r:id="rId5"/>
+              </a:rPr>
+              <a:t>DAGMan</a:t>
+            </a:r>
+            <a:r>
+              <a:rPr lang="en-US" dirty="0">
+                <a:hlinkClick r:id="rId5"/>
+              </a:rPr>
+              <a:t> </a:t>
+            </a:r>
+            <a:r>
               <a:rPr lang="en-US" dirty="0"/>
-              <a:t>Workflows with </a:t>
-            </a:r>
-            <a:r>
-              <a:rPr lang="en-US" dirty="0" err="1"/>
-              <a:t>DAGMan</a:t>
-            </a:r>
-            <a:r>
-              <a:rPr lang="en-US" dirty="0"/>
-              <a:t> (Thurs)</a:t>
+              <a:t>(Thurs)</a:t>
             </a:r>
           </a:p>
           <a:p>
@@ -12341,7 +12373,7 @@
             </a:pPr>
             <a:r>
               <a:rPr lang="en-US" dirty="0">
-                <a:hlinkClick r:id="rId3"/>
+                <a:hlinkClick r:id="rId6"/>
               </a:rPr>
               <a:t>Main Page</a:t>
             </a:r>
@@ -12351,7 +12383,7 @@
             </a:r>
             <a:r>
               <a:rPr lang="en-US" dirty="0">
-                <a:hlinkClick r:id="rId4"/>
+                <a:hlinkClick r:id="rId7"/>
               </a:rPr>
               <a:t>Submit HTC Workloads</a:t>
             </a:r>
@@ -12371,7 +12403,7 @@
             </a:pPr>
             <a:r>
               <a:rPr lang="en-US" dirty="0">
-                <a:hlinkClick r:id="rId3"/>
+                <a:hlinkClick r:id="rId6"/>
               </a:rPr>
               <a:t>Main Page </a:t>
             </a:r>
@@ -12381,7 +12413,7 @@
             </a:r>
             <a:r>
               <a:rPr lang="en-US" dirty="0">
-                <a:hlinkClick r:id="rId4"/>
+                <a:hlinkClick r:id="rId7"/>
               </a:rPr>
               <a:t>Submit HTC Workloads</a:t>
             </a:r>
@@ -12590,8 +12622,14 @@
               </a:spcAft>
             </a:pPr>
             <a:r>
+              <a:rPr lang="en-US" dirty="0">
+                <a:hlinkClick r:id="rId3"/>
+              </a:rPr>
+              <a:t>Software</a:t>
+            </a:r>
+            <a:r>
               <a:rPr lang="en-US" dirty="0"/>
-              <a:t>Software (Tuesday)</a:t>
+              <a:t> (Tuesday)</a:t>
             </a:r>
           </a:p>
           <a:p>
@@ -12604,8 +12642,14 @@
               </a:spcAft>
             </a:pPr>
             <a:r>
+              <a:rPr lang="en-US" dirty="0">
+                <a:hlinkClick r:id="rId4"/>
+              </a:rPr>
+              <a:t>Data</a:t>
+            </a:r>
+            <a:r>
               <a:rPr lang="en-US" dirty="0"/>
-              <a:t>Data (Wednesday)</a:t>
+              <a:t> (Wednesday)</a:t>
             </a:r>
           </a:p>
           <a:p>
@@ -12633,7 +12677,7 @@
             </a:pPr>
             <a:r>
               <a:rPr lang="en-US" dirty="0">
-                <a:hlinkClick r:id="rId3"/>
+                <a:hlinkClick r:id="rId5"/>
               </a:rPr>
               <a:t>Main Page</a:t>
             </a:r>
@@ -12643,7 +12687,7 @@
             </a:r>
             <a:r>
               <a:rPr lang="en-US" dirty="0">
-                <a:hlinkClick r:id="rId4"/>
+                <a:hlinkClick r:id="rId6"/>
               </a:rPr>
               <a:t>Submit HTC Workloads</a:t>
             </a:r>
@@ -12663,7 +12707,7 @@
             </a:pPr>
             <a:r>
               <a:rPr lang="en-US" dirty="0">
-                <a:hlinkClick r:id="rId3"/>
+                <a:hlinkClick r:id="rId5"/>
               </a:rPr>
               <a:t>Main Page</a:t>
             </a:r>
@@ -12673,7 +12717,7 @@
             </a:r>
             <a:r>
               <a:rPr lang="en-US" dirty="0">
-                <a:hlinkClick r:id="rId4"/>
+                <a:hlinkClick r:id="rId6"/>
               </a:rPr>
               <a:t>Submit HTC Workloads</a:t>
             </a:r>
@@ -13788,23 +13832,7 @@
                 <a:ea typeface="Helvetica Neue Medium" panose="02000503000000020004" pitchFamily="2" charset="0"/>
                 <a:cs typeface="Helvetica Neue Medium" panose="02000503000000020004" pitchFamily="2" charset="0"/>
               </a:rPr>
-              <a:t>Don’t use any LLMs / </a:t>
-            </a:r>
-            <a:r>
-              <a:rPr lang="en-US" dirty="0">
-                <a:latin typeface="Helvetica Neue Medium" panose="02000503000000020004" pitchFamily="2" charset="0"/>
-                <a:ea typeface="Helvetica Neue Medium" panose="02000503000000020004" pitchFamily="2" charset="0"/>
-                <a:cs typeface="Helvetica Neue Medium" panose="02000503000000020004" pitchFamily="2" charset="0"/>
-              </a:rPr>
-              <a:t>AI agents </a:t>
-            </a:r>
-            <a:r>
-              <a:rPr lang="en-US" dirty="0">
-                <a:latin typeface="Helvetica Neue Medium" panose="02000503000000020004" pitchFamily="2" charset="0"/>
-                <a:ea typeface="Helvetica Neue Medium" panose="02000503000000020004" pitchFamily="2" charset="0"/>
-                <a:cs typeface="Helvetica Neue Medium" panose="02000503000000020004" pitchFamily="2" charset="0"/>
-              </a:rPr>
-              <a:t>for at least the first 2 days of the School. </a:t>
+              <a:t>Don’t use any LLMs / AI agents for at least the first 2 days of the School. </a:t>
             </a:r>
           </a:p>
           <a:p>
